--- a/presentation/EtherQuest_Presentation.pptx
+++ b/presentation/EtherQuest_Presentation.pptx
@@ -1632,6 +1632,17 @@
                 <a:cs typeface="Georgia" pitchFamily="34" charset="-120"/>
               </a:rPr>
               <a:t>Derin Yüksel</a:t>
+            </a:r>
+            <a:r>
+              <a:rPr lang="tr-TR" sz="2000" b="1" dirty="0">
+                <a:solidFill>
+                  <a:srgbClr val="EDEEF7"/>
+                </a:solidFill>
+                <a:latin typeface="Georgia" pitchFamily="34" charset="0"/>
+                <a:ea typeface="Georgia" pitchFamily="34" charset="-122"/>
+                <a:cs typeface="Georgia" pitchFamily="34" charset="-120"/>
+              </a:rPr>
+              <a:t> - 2200001724</a:t>
             </a:r>
             <a:endParaRPr lang="en-US" sz="2000" dirty="0"/>
           </a:p>
